--- a/ANCHOR-Gym-System-Overview.pptx
+++ b/ANCHOR-Gym-System-Overview.pptx
@@ -4,12 +4,14 @@
   <p:sldMasterIdLst>
     <p:sldMasterId id="2147483648" r:id="rId1"/>
   </p:sldMasterIdLst>
+  <p:notesMasterIdLst>
+    <p:notesMasterId r:id="rId5"/>
+  </p:notesMasterIdLst>
   <p:sldIdLst>
     <p:sldId id="256" r:id="rId3"/>
     <p:sldId id="257" r:id="rId4"/>
-    <p:sldId id="258" r:id="rId5"/>
-    <p:sldId id="259" r:id="rId6"/>
-    <p:sldId id="260" r:id="rId7"/>
+    <p:sldId id="258" r:id="rId6"/>
+    <p:sldId id="259" r:id="rId7"/>
   </p:sldIdLst>
   <p:sldSz cx="12191365" cy="6858000"/>
   <p:notesSz cx="6858000" cy="9144000"/>
@@ -125,6 +127,401 @@
     </p:ext>
   </p:extLst>
 </p:presentation>
+</file>
+
+<file path=ppt/notesMasters/notesMaster1.xml><?xml version="1.0" encoding="utf-8"?>
+<p:notesMaster xmlns:a="http://schemas.openxmlformats.org/drawingml/2006/main" xmlns:r="http://schemas.openxmlformats.org/officeDocument/2006/relationships" xmlns:p="http://schemas.openxmlformats.org/presentationml/2006/main">
+  <p:cSld>
+    <p:bg>
+      <p:bgRef idx="1001">
+        <a:schemeClr val="bg1"/>
+      </p:bgRef>
+    </p:bg>
+    <p:spTree>
+      <p:nvGrpSpPr>
+        <p:cNvPr id="1" name=""/>
+        <p:cNvGrpSpPr/>
+        <p:nvPr/>
+      </p:nvGrpSpPr>
+      <p:grpSpPr>
+        <a:xfrm>
+          <a:off x="0" y="0"/>
+          <a:ext cx="0" cy="0"/>
+          <a:chOff x="0" y="0"/>
+          <a:chExt cx="0" cy="0"/>
+        </a:xfrm>
+      </p:grpSpPr>
+      <p:sp>
+        <p:nvSpPr>
+          <p:cNvPr id="2" name="Header Placeholder 1"/>
+          <p:cNvSpPr>
+            <a:spLocks noGrp="1"/>
+          </p:cNvSpPr>
+          <p:nvPr>
+            <p:ph type="hdr" sz="quarter"/>
+          </p:nvPr>
+        </p:nvSpPr>
+        <p:spPr>
+          <a:xfrm>
+            <a:off x="0" y="0"/>
+            <a:ext cx="2971800" cy="458788"/>
+          </a:xfrm>
+          <a:prstGeom prst="rect">
+            <a:avLst/>
+          </a:prstGeom>
+        </p:spPr>
+        <p:txBody>
+          <a:bodyPr vert="horz" lIns="91440" tIns="45720" rIns="91440" bIns="45720" rtlCol="0"/>
+          <a:lstStyle>
+            <a:lvl1pPr algn="l">
+              <a:defRPr sz="1200"/>
+            </a:lvl1pPr>
+          </a:lstStyle>
+          <a:p>
+            <a:endParaRPr lang="en-US"/>
+          </a:p>
+        </p:txBody>
+      </p:sp>
+      <p:sp>
+        <p:nvSpPr>
+          <p:cNvPr id="3" name="Date Placeholder 2"/>
+          <p:cNvSpPr>
+            <a:spLocks noGrp="1"/>
+          </p:cNvSpPr>
+          <p:nvPr>
+            <p:ph type="dt" idx="1"/>
+          </p:nvPr>
+        </p:nvSpPr>
+        <p:spPr>
+          <a:xfrm>
+            <a:off x="3884613" y="0"/>
+            <a:ext cx="2971800" cy="458788"/>
+          </a:xfrm>
+          <a:prstGeom prst="rect">
+            <a:avLst/>
+          </a:prstGeom>
+        </p:spPr>
+        <p:txBody>
+          <a:bodyPr vert="horz" lIns="91440" tIns="45720" rIns="91440" bIns="45720" rtlCol="0"/>
+          <a:lstStyle>
+            <a:lvl1pPr algn="r">
+              <a:defRPr sz="1200"/>
+            </a:lvl1pPr>
+          </a:lstStyle>
+          <a:p>
+            <a:fld id="{3EFD42F7-718C-4B98-AAEC-167E6DDD60A7}" type="datetimeFigureOut">
+              <a:rPr lang="en-US" smtClean="0"/>
+            </a:fld>
+            <a:endParaRPr lang="en-US"/>
+          </a:p>
+        </p:txBody>
+      </p:sp>
+      <p:sp>
+        <p:nvSpPr>
+          <p:cNvPr id="4" name="Slide Image Placeholder 3"/>
+          <p:cNvSpPr>
+            <a:spLocks noGrp="1" noRot="1" noChangeAspect="1"/>
+          </p:cNvSpPr>
+          <p:nvPr>
+            <p:ph type="sldImg" idx="2"/>
+          </p:nvPr>
+        </p:nvSpPr>
+        <p:spPr>
+          <a:xfrm>
+            <a:off x="685943" y="1143000"/>
+            <a:ext cx="5486114" cy="3086100"/>
+          </a:xfrm>
+          <a:prstGeom prst="rect">
+            <a:avLst/>
+          </a:prstGeom>
+          <a:noFill/>
+          <a:ln w="12700">
+            <a:solidFill>
+              <a:prstClr val="black"/>
+            </a:solidFill>
+          </a:ln>
+        </p:spPr>
+        <p:txBody>
+          <a:bodyPr vert="horz" lIns="91440" tIns="45720" rIns="91440" bIns="45720" rtlCol="0" anchor="ctr"/>
+          <a:lstStyle/>
+          <a:p>
+            <a:endParaRPr lang="en-US"/>
+          </a:p>
+        </p:txBody>
+      </p:sp>
+      <p:sp>
+        <p:nvSpPr>
+          <p:cNvPr id="5" name="Notes Placeholder 4"/>
+          <p:cNvSpPr>
+            <a:spLocks noGrp="1"/>
+          </p:cNvSpPr>
+          <p:nvPr>
+            <p:ph type="body" sz="quarter" idx="3"/>
+          </p:nvPr>
+        </p:nvSpPr>
+        <p:spPr>
+          <a:xfrm>
+            <a:off x="685800" y="4400550"/>
+            <a:ext cx="5486400" cy="3600450"/>
+          </a:xfrm>
+          <a:prstGeom prst="rect">
+            <a:avLst/>
+          </a:prstGeom>
+        </p:spPr>
+        <p:txBody>
+          <a:bodyPr vert="horz" lIns="91440" tIns="45720" rIns="91440" bIns="45720" rtlCol="0"/>
+          <a:lstStyle/>
+          <a:p>
+            <a:pPr lvl="0"/>
+            <a:r>
+              <a:rPr lang="en-US" smtClean="0"/>
+              <a:t>Click to edit Master text styles</a:t>
+            </a:r>
+            <a:endParaRPr lang="en-US" smtClean="0"/>
+          </a:p>
+          <a:p>
+            <a:pPr lvl="1"/>
+            <a:r>
+              <a:rPr lang="en-US" smtClean="0"/>
+              <a:t>Second level</a:t>
+            </a:r>
+            <a:endParaRPr lang="en-US" smtClean="0"/>
+          </a:p>
+          <a:p>
+            <a:pPr lvl="2"/>
+            <a:r>
+              <a:rPr lang="en-US" smtClean="0"/>
+              <a:t>Third level</a:t>
+            </a:r>
+            <a:endParaRPr lang="en-US" smtClean="0"/>
+          </a:p>
+          <a:p>
+            <a:pPr lvl="3"/>
+            <a:r>
+              <a:rPr lang="en-US" smtClean="0"/>
+              <a:t>Fourth level</a:t>
+            </a:r>
+            <a:endParaRPr lang="en-US" smtClean="0"/>
+          </a:p>
+          <a:p>
+            <a:pPr lvl="4"/>
+            <a:r>
+              <a:rPr lang="en-US" smtClean="0"/>
+              <a:t>Fifth level</a:t>
+            </a:r>
+            <a:endParaRPr lang="en-US"/>
+          </a:p>
+        </p:txBody>
+      </p:sp>
+      <p:sp>
+        <p:nvSpPr>
+          <p:cNvPr id="6" name="Footer Placeholder 5"/>
+          <p:cNvSpPr>
+            <a:spLocks noGrp="1"/>
+          </p:cNvSpPr>
+          <p:nvPr>
+            <p:ph type="ftr" sz="quarter" idx="4"/>
+          </p:nvPr>
+        </p:nvSpPr>
+        <p:spPr>
+          <a:xfrm>
+            <a:off x="0" y="8685213"/>
+            <a:ext cx="2971800" cy="458787"/>
+          </a:xfrm>
+          <a:prstGeom prst="rect">
+            <a:avLst/>
+          </a:prstGeom>
+        </p:spPr>
+        <p:txBody>
+          <a:bodyPr vert="horz" lIns="91440" tIns="45720" rIns="91440" bIns="45720" rtlCol="0" anchor="b"/>
+          <a:lstStyle>
+            <a:lvl1pPr algn="l">
+              <a:defRPr sz="1200"/>
+            </a:lvl1pPr>
+          </a:lstStyle>
+          <a:p>
+            <a:endParaRPr lang="en-US"/>
+          </a:p>
+        </p:txBody>
+      </p:sp>
+      <p:sp>
+        <p:nvSpPr>
+          <p:cNvPr id="7" name="Slide Number Placeholder 6"/>
+          <p:cNvSpPr>
+            <a:spLocks noGrp="1"/>
+          </p:cNvSpPr>
+          <p:nvPr>
+            <p:ph type="sldNum" sz="quarter" idx="5"/>
+          </p:nvPr>
+        </p:nvSpPr>
+        <p:spPr>
+          <a:xfrm>
+            <a:off x="3884613" y="8685213"/>
+            <a:ext cx="2971800" cy="458787"/>
+          </a:xfrm>
+          <a:prstGeom prst="rect">
+            <a:avLst/>
+          </a:prstGeom>
+        </p:spPr>
+        <p:txBody>
+          <a:bodyPr vert="horz" lIns="91440" tIns="45720" rIns="91440" bIns="45720" rtlCol="0" anchor="b"/>
+          <a:lstStyle>
+            <a:lvl1pPr algn="r">
+              <a:defRPr sz="1200"/>
+            </a:lvl1pPr>
+          </a:lstStyle>
+          <a:p>
+            <a:fld id="{21B2AA4F-B828-4D7C-AFD3-893933DAFCB4}" type="slidenum">
+              <a:rPr lang="en-US" smtClean="0"/>
+            </a:fld>
+            <a:endParaRPr lang="en-US"/>
+          </a:p>
+        </p:txBody>
+      </p:sp>
+    </p:spTree>
+  </p:cSld>
+  <p:clrMap bg1="lt1" tx1="dk1" bg2="lt2" tx2="dk2" accent1="accent1" accent2="accent2" accent3="accent3" accent4="accent4" accent5="accent5" accent6="accent6" hlink="hlink" folHlink="folHlink"/>
+  <p:notesStyle>
+    <a:lvl1pPr marL="0" algn="l" defTabSz="914400" rtl="0" eaLnBrk="1" latinLnBrk="0" hangingPunct="1">
+      <a:defRPr sz="1200" kern="1200">
+        <a:solidFill>
+          <a:schemeClr val="tx1"/>
+        </a:solidFill>
+        <a:latin typeface="+mn-lt"/>
+        <a:ea typeface="+mn-ea"/>
+        <a:cs typeface="+mn-cs"/>
+      </a:defRPr>
+    </a:lvl1pPr>
+    <a:lvl2pPr marL="457200" algn="l" defTabSz="914400" rtl="0" eaLnBrk="1" latinLnBrk="0" hangingPunct="1">
+      <a:defRPr sz="1200" kern="1200">
+        <a:solidFill>
+          <a:schemeClr val="tx1"/>
+        </a:solidFill>
+        <a:latin typeface="+mn-lt"/>
+        <a:ea typeface="+mn-ea"/>
+        <a:cs typeface="+mn-cs"/>
+      </a:defRPr>
+    </a:lvl2pPr>
+    <a:lvl3pPr marL="914400" algn="l" defTabSz="914400" rtl="0" eaLnBrk="1" latinLnBrk="0" hangingPunct="1">
+      <a:defRPr sz="1200" kern="1200">
+        <a:solidFill>
+          <a:schemeClr val="tx1"/>
+        </a:solidFill>
+        <a:latin typeface="+mn-lt"/>
+        <a:ea typeface="+mn-ea"/>
+        <a:cs typeface="+mn-cs"/>
+      </a:defRPr>
+    </a:lvl3pPr>
+    <a:lvl4pPr marL="1371600" algn="l" defTabSz="914400" rtl="0" eaLnBrk="1" latinLnBrk="0" hangingPunct="1">
+      <a:defRPr sz="1200" kern="1200">
+        <a:solidFill>
+          <a:schemeClr val="tx1"/>
+        </a:solidFill>
+        <a:latin typeface="+mn-lt"/>
+        <a:ea typeface="+mn-ea"/>
+        <a:cs typeface="+mn-cs"/>
+      </a:defRPr>
+    </a:lvl4pPr>
+    <a:lvl5pPr marL="1828800" algn="l" defTabSz="914400" rtl="0" eaLnBrk="1" latinLnBrk="0" hangingPunct="1">
+      <a:defRPr sz="1200" kern="1200">
+        <a:solidFill>
+          <a:schemeClr val="tx1"/>
+        </a:solidFill>
+        <a:latin typeface="+mn-lt"/>
+        <a:ea typeface="+mn-ea"/>
+        <a:cs typeface="+mn-cs"/>
+      </a:defRPr>
+    </a:lvl5pPr>
+    <a:lvl6pPr marL="2286000" algn="l" defTabSz="914400" rtl="0" eaLnBrk="1" latinLnBrk="0" hangingPunct="1">
+      <a:defRPr sz="1200" kern="1200">
+        <a:solidFill>
+          <a:schemeClr val="tx1"/>
+        </a:solidFill>
+        <a:latin typeface="+mn-lt"/>
+        <a:ea typeface="+mn-ea"/>
+        <a:cs typeface="+mn-cs"/>
+      </a:defRPr>
+    </a:lvl6pPr>
+    <a:lvl7pPr marL="2743200" algn="l" defTabSz="914400" rtl="0" eaLnBrk="1" latinLnBrk="0" hangingPunct="1">
+      <a:defRPr sz="1200" kern="1200">
+        <a:solidFill>
+          <a:schemeClr val="tx1"/>
+        </a:solidFill>
+        <a:latin typeface="+mn-lt"/>
+        <a:ea typeface="+mn-ea"/>
+        <a:cs typeface="+mn-cs"/>
+      </a:defRPr>
+    </a:lvl7pPr>
+    <a:lvl8pPr marL="3200400" algn="l" defTabSz="914400" rtl="0" eaLnBrk="1" latinLnBrk="0" hangingPunct="1">
+      <a:defRPr sz="1200" kern="1200">
+        <a:solidFill>
+          <a:schemeClr val="tx1"/>
+        </a:solidFill>
+        <a:latin typeface="+mn-lt"/>
+        <a:ea typeface="+mn-ea"/>
+        <a:cs typeface="+mn-cs"/>
+      </a:defRPr>
+    </a:lvl8pPr>
+    <a:lvl9pPr marL="3657600" algn="l" defTabSz="914400" rtl="0" eaLnBrk="1" latinLnBrk="0" hangingPunct="1">
+      <a:defRPr sz="1200" kern="1200">
+        <a:solidFill>
+          <a:schemeClr val="tx1"/>
+        </a:solidFill>
+        <a:latin typeface="+mn-lt"/>
+        <a:ea typeface="+mn-ea"/>
+        <a:cs typeface="+mn-cs"/>
+      </a:defRPr>
+    </a:lvl9pPr>
+  </p:notesStyle>
+</p:notesMaster>
+</file>
+
+<file path=ppt/notesSlides/notesSlide1.xml><?xml version="1.0" encoding="utf-8"?>
+<p:notes xmlns:a="http://schemas.openxmlformats.org/drawingml/2006/main" xmlns:r="http://schemas.openxmlformats.org/officeDocument/2006/relationships" xmlns:p="http://schemas.openxmlformats.org/presentationml/2006/main">
+  <p:cSld>
+    <p:spTree>
+      <p:nvGrpSpPr>
+        <p:cNvPr id="1" name=""/>
+        <p:cNvGrpSpPr/>
+        <p:nvPr/>
+      </p:nvGrpSpPr>
+      <p:grpSpPr/>
+      <p:sp>
+        <p:nvSpPr>
+          <p:cNvPr id="2" name="Slide Image Placeholder 1"/>
+          <p:cNvSpPr>
+            <a:spLocks noGrp="1"/>
+          </p:cNvSpPr>
+          <p:nvPr>
+            <p:ph type="sldImg" idx="2"/>
+          </p:nvPr>
+        </p:nvSpPr>
+        <p:spPr/>
+      </p:sp>
+      <p:sp>
+        <p:nvSpPr>
+          <p:cNvPr id="3" name="Text Placeholder 2"/>
+          <p:cNvSpPr>
+            <a:spLocks noGrp="1"/>
+          </p:cNvSpPr>
+          <p:nvPr>
+            <p:ph type="body" idx="3"/>
+          </p:nvPr>
+        </p:nvSpPr>
+        <p:spPr/>
+        <p:txBody>
+          <a:bodyPr/>
+          <a:p>
+            <a:endParaRPr lang="en-US"/>
+          </a:p>
+        </p:txBody>
+      </p:sp>
+    </p:spTree>
+  </p:cSld>
+  <p:clrMapOvr>
+    <a:masterClrMapping/>
+  </p:clrMapOvr>
+</p:notes>
 </file>
 
 <file path=ppt/slideLayouts/slideLayout1.xml><?xml version="1.0" encoding="utf-8"?>
@@ -3103,7 +3500,7 @@
           </a:ln>
           <a:extLst>
             <a:ext uri="{91240B29-F687-4F45-9708-019B960494DF}">
-              <a14:hiddenLine xmlns:a14="http://schemas.microsoft.com/office/drawing/2010/main" w="12700" cap="flat" cmpd="sng" algn="ctr">
+              <a14:hiddenLine xmlns:a14="http://schemas.microsoft.com/office/drawing/2010/main" w="12700">
                 <a:solidFill>
                   <a:schemeClr val="accent1">
                     <a:lumMod val="75000"/>
@@ -3292,7 +3689,7 @@
           </a:ln>
           <a:extLst>
             <a:ext uri="{91240B29-F687-4F45-9708-019B960494DF}">
-              <a14:hiddenLine xmlns:a14="http://schemas.microsoft.com/office/drawing/2010/main" w="12700" cap="flat" cmpd="sng" algn="ctr">
+              <a14:hiddenLine xmlns:a14="http://schemas.microsoft.com/office/drawing/2010/main" w="12700">
                 <a:solidFill>
                   <a:schemeClr val="accent1">
                     <a:lumMod val="75000"/>
@@ -3720,7 +4117,7 @@
           </a:ln>
           <a:extLst>
             <a:ext uri="{91240B29-F687-4F45-9708-019B960494DF}">
-              <a14:hiddenLine xmlns:a14="http://schemas.microsoft.com/office/drawing/2010/main" w="12700" cap="flat" cmpd="sng" algn="ctr">
+              <a14:hiddenLine xmlns:a14="http://schemas.microsoft.com/office/drawing/2010/main" w="12700">
                 <a:solidFill>
                   <a:schemeClr val="accent1">
                     <a:lumMod val="75000"/>
@@ -4116,7 +4513,7 @@
           </a:ln>
           <a:extLst>
             <a:ext uri="{91240B29-F687-4F45-9708-019B960494DF}">
-              <a14:hiddenLine xmlns:a14="http://schemas.microsoft.com/office/drawing/2010/main" w="12700" cap="flat" cmpd="sng" algn="ctr">
+              <a14:hiddenLine xmlns:a14="http://schemas.microsoft.com/office/drawing/2010/main" w="12700">
                 <a:solidFill>
                   <a:schemeClr val="accent1">
                     <a:lumMod val="75000"/>
@@ -4354,7 +4751,7 @@
           </a:ln>
           <a:extLst>
             <a:ext uri="{91240B29-F687-4F45-9708-019B960494DF}">
-              <a14:hiddenLine xmlns:a14="http://schemas.microsoft.com/office/drawing/2010/main" w="12700" cap="flat" cmpd="sng" algn="ctr">
+              <a14:hiddenLine xmlns:a14="http://schemas.microsoft.com/office/drawing/2010/main" w="12700">
                 <a:solidFill>
                   <a:schemeClr val="accent1">
                     <a:lumMod val="75000"/>
@@ -4571,7 +4968,7 @@
           </a:ln>
           <a:extLst>
             <a:ext uri="{91240B29-F687-4F45-9708-019B960494DF}">
-              <a14:hiddenLine xmlns:a14="http://schemas.microsoft.com/office/drawing/2010/main" w="12700" cap="flat" cmpd="sng" algn="ctr">
+              <a14:hiddenLine xmlns:a14="http://schemas.microsoft.com/office/drawing/2010/main" w="12700">
                 <a:solidFill>
                   <a:schemeClr val="accent1">
                     <a:lumMod val="75000"/>
@@ -5799,7 +6196,7 @@
           </a:ln>
           <a:extLst>
             <a:ext uri="{91240B29-F687-4F45-9708-019B960494DF}">
-              <a14:hiddenLine xmlns:a14="http://schemas.microsoft.com/office/drawing/2010/main" w="12700" cap="flat" cmpd="sng" algn="ctr">
+              <a14:hiddenLine xmlns:a14="http://schemas.microsoft.com/office/drawing/2010/main" w="12700">
                 <a:solidFill>
                   <a:schemeClr val="accent1">
                     <a:lumMod val="75000"/>
@@ -6195,7 +6592,7 @@
           </a:ln>
           <a:extLst>
             <a:ext uri="{91240B29-F687-4F45-9708-019B960494DF}">
-              <a14:hiddenLine xmlns:a14="http://schemas.microsoft.com/office/drawing/2010/main" w="12700" cap="flat" cmpd="sng" algn="ctr">
+              <a14:hiddenLine xmlns:a14="http://schemas.microsoft.com/office/drawing/2010/main" w="12700">
                 <a:solidFill>
                   <a:schemeClr val="accent1">
                     <a:lumMod val="75000"/>
@@ -6430,7 +6827,7 @@
           </a:ln>
           <a:extLst>
             <a:ext uri="{91240B29-F687-4F45-9708-019B960494DF}">
-              <a14:hiddenLine xmlns:a14="http://schemas.microsoft.com/office/drawing/2010/main" w="12700" cap="flat" cmpd="sng" algn="ctr">
+              <a14:hiddenLine xmlns:a14="http://schemas.microsoft.com/office/drawing/2010/main" w="12700">
                 <a:solidFill>
                   <a:schemeClr val="accent1">
                     <a:lumMod val="75000"/>
@@ -6665,7 +7062,7 @@
           </a:ln>
           <a:extLst>
             <a:ext uri="{91240B29-F687-4F45-9708-019B960494DF}">
-              <a14:hiddenLine xmlns:a14="http://schemas.microsoft.com/office/drawing/2010/main" w="12700" cap="flat" cmpd="sng" algn="ctr">
+              <a14:hiddenLine xmlns:a14="http://schemas.microsoft.com/office/drawing/2010/main" w="12700">
                 <a:solidFill>
                   <a:schemeClr val="accent1">
                     <a:lumMod val="75000"/>
@@ -6900,7 +7297,7 @@
           </a:ln>
           <a:extLst>
             <a:ext uri="{91240B29-F687-4F45-9708-019B960494DF}">
-              <a14:hiddenLine xmlns:a14="http://schemas.microsoft.com/office/drawing/2010/main" w="12700" cap="flat" cmpd="sng" algn="ctr">
+              <a14:hiddenLine xmlns:a14="http://schemas.microsoft.com/office/drawing/2010/main" w="12700">
                 <a:solidFill>
                   <a:schemeClr val="accent1">
                     <a:lumMod val="75000"/>
@@ -7057,1309 +7454,6 @@
             <a:endParaRPr lang="en-US" sz="1300">
               <a:solidFill>
                 <a:srgbClr val="AEBCC6"/>
-              </a:solidFill>
-              <a:latin typeface="Aptos" charset="0"/>
-              <a:cs typeface="Aptos" charset="0"/>
-            </a:endParaRPr>
-          </a:p>
-        </p:txBody>
-      </p:sp>
-    </p:spTree>
-  </p:cSld>
-  <p:clrMapOvr>
-    <a:masterClrMapping/>
-  </p:clrMapOvr>
-</p:sld>
-</file>
-
-<file path=ppt/slides/slide5.xml><?xml version="1.0" encoding="utf-8"?>
-<p:sld xmlns:a="http://schemas.openxmlformats.org/drawingml/2006/main" xmlns:r="http://schemas.openxmlformats.org/officeDocument/2006/relationships" xmlns:p="http://schemas.openxmlformats.org/presentationml/2006/main">
-  <p:cSld>
-    <p:bg>
-      <p:bgPr>
-        <a:solidFill>
-          <a:srgbClr val="070B0F"/>
-        </a:solidFill>
-        <a:effectLst/>
-      </p:bgPr>
-    </p:bg>
-    <p:spTree>
-      <p:nvGrpSpPr>
-        <p:cNvPr id="1" name=""/>
-        <p:cNvGrpSpPr/>
-        <p:nvPr/>
-      </p:nvGrpSpPr>
-      <p:grpSpPr/>
-      <p:sp>
-        <p:nvSpPr>
-          <p:cNvPr id="2" name="Rectangle 1"/>
-          <p:cNvSpPr/>
-          <p:nvPr/>
-        </p:nvSpPr>
-        <p:spPr>
-          <a:xfrm>
-            <a:off x="502920" y="383540"/>
-            <a:ext cx="383540" cy="55245"/>
-          </a:xfrm>
-          <a:prstGeom prst="rect">
-            <a:avLst/>
-          </a:prstGeom>
-          <a:solidFill>
-            <a:srgbClr val="EE2A3A"/>
-          </a:solidFill>
-          <a:ln w="12700" cap="flat" cmpd="sng" algn="ctr">
-            <a:noFill/>
-            <a:prstDash val="solid"/>
-            <a:miter lim="800000"/>
-          </a:ln>
-          <a:extLst>
-            <a:ext uri="{91240B29-F687-4F45-9708-019B960494DF}">
-              <a14:hiddenLine xmlns:a14="http://schemas.microsoft.com/office/drawing/2010/main" w="12700" cap="flat" cmpd="sng" algn="ctr">
-                <a:solidFill>
-                  <a:schemeClr val="accent1">
-                    <a:lumMod val="75000"/>
-                  </a:schemeClr>
-                </a:solidFill>
-                <a:prstDash val="solid"/>
-                <a:miter lim="800000"/>
-                <a:headEnd/>
-                <a:tailEnd/>
-              </a14:hiddenLine>
-            </a:ext>
-          </a:extLst>
-        </p:spPr>
-        <p:style>
-          <a:lnRef idx="2">
-            <a:schemeClr val="accent1">
-              <a:lumMod val="75000"/>
-            </a:schemeClr>
-          </a:lnRef>
-          <a:fillRef idx="1">
-            <a:schemeClr val="accent1"/>
-          </a:fillRef>
-          <a:effectRef idx="0">
-            <a:srgbClr val="FFFFFF"/>
-          </a:effectRef>
-          <a:fontRef idx="minor">
-            <a:schemeClr val="lt1"/>
-          </a:fontRef>
-        </p:style>
-        <p:txBody>
-          <a:bodyPr rtlCol="0" anchor="ctr"/>
-          <a:p>
-            <a:pPr algn="ctr"/>
-            <a:endParaRPr lang="en-US"/>
-          </a:p>
-        </p:txBody>
-      </p:sp>
-      <p:sp>
-        <p:nvSpPr>
-          <p:cNvPr id="3" name="Text Box 2"/>
-          <p:cNvSpPr txBox="1"/>
-          <p:nvPr/>
-        </p:nvSpPr>
-        <p:spPr>
-          <a:xfrm>
-            <a:off x="502920" y="530225"/>
-            <a:ext cx="3657600" cy="153670"/>
-          </a:xfrm>
-          <a:prstGeom prst="rect">
-            <a:avLst/>
-          </a:prstGeom>
-          <a:noFill/>
-        </p:spPr>
-        <p:txBody>
-          <a:bodyPr wrap="square" lIns="0" tIns="0" rIns="0" bIns="0" rtlCol="0" anchor="t">
-            <a:spAutoFit/>
-          </a:bodyPr>
-          <a:p>
-            <a:pPr algn="l"/>
-            <a:r>
-              <a:rPr lang="en-US" sz="1000" b="1">
-                <a:solidFill>
-                  <a:srgbClr val="B1BEC7"/>
-                </a:solidFill>
-                <a:latin typeface="Aptos" charset="0"/>
-                <a:cs typeface="Aptos" charset="0"/>
-              </a:rPr>
-              <a:t>ANCHOR  /  GYM SYSTEM</a:t>
-            </a:r>
-            <a:endParaRPr lang="en-US" sz="1000" b="1">
-              <a:solidFill>
-                <a:srgbClr val="B1BEC7"/>
-              </a:solidFill>
-              <a:latin typeface="Aptos" charset="0"/>
-              <a:cs typeface="Aptos" charset="0"/>
-            </a:endParaRPr>
-          </a:p>
-        </p:txBody>
-      </p:sp>
-      <p:sp>
-        <p:nvSpPr>
-          <p:cNvPr id="4" name="Text Box 3"/>
-          <p:cNvSpPr txBox="1"/>
-          <p:nvPr/>
-        </p:nvSpPr>
-        <p:spPr>
-          <a:xfrm>
-            <a:off x="8503920" y="530225"/>
-            <a:ext cx="3154680" cy="138430"/>
-          </a:xfrm>
-          <a:prstGeom prst="rect">
-            <a:avLst/>
-          </a:prstGeom>
-          <a:noFill/>
-        </p:spPr>
-        <p:txBody>
-          <a:bodyPr wrap="square" lIns="0" tIns="0" rIns="0" bIns="0" rtlCol="0" anchor="t">
-            <a:spAutoFit/>
-          </a:bodyPr>
-          <a:p>
-            <a:pPr algn="r"/>
-            <a:r>
-              <a:rPr lang="en-US" sz="900" b="1">
-                <a:solidFill>
-                  <a:srgbClr val="6F818D"/>
-                </a:solidFill>
-                <a:latin typeface="Aptos" charset="0"/>
-                <a:cs typeface="Aptos" charset="0"/>
-              </a:rPr>
-              <a:t>HOW IT WORKS</a:t>
-            </a:r>
-            <a:endParaRPr lang="en-US" sz="900" b="1">
-              <a:solidFill>
-                <a:srgbClr val="6F818D"/>
-              </a:solidFill>
-              <a:latin typeface="Aptos" charset="0"/>
-              <a:cs typeface="Aptos" charset="0"/>
-            </a:endParaRPr>
-          </a:p>
-        </p:txBody>
-      </p:sp>
-      <p:cxnSp>
-        <p:nvCxnSpPr>
-          <p:cNvPr id="5" name="Straight Connector 4"/>
-          <p:cNvCxnSpPr/>
-          <p:nvPr/>
-        </p:nvCxnSpPr>
-        <p:spPr>
-          <a:xfrm>
-            <a:off x="502920" y="6428105"/>
-            <a:ext cx="11182985" cy="635"/>
-          </a:xfrm>
-          <a:prstGeom prst="line">
-            <a:avLst/>
-          </a:prstGeom>
-          <a:ln w="10160">
-            <a:solidFill>
-              <a:srgbClr val="23313A"/>
-            </a:solidFill>
-          </a:ln>
-        </p:spPr>
-        <p:style>
-          <a:lnRef idx="2">
-            <a:schemeClr val="accent1"/>
-          </a:lnRef>
-          <a:fillRef idx="0">
-            <a:srgbClr val="FFFFFF"/>
-          </a:fillRef>
-          <a:effectRef idx="0">
-            <a:srgbClr val="FFFFFF"/>
-          </a:effectRef>
-          <a:fontRef idx="minor">
-            <a:schemeClr val="tx1"/>
-          </a:fontRef>
-        </p:style>
-      </p:cxnSp>
-      <p:sp>
-        <p:nvSpPr>
-          <p:cNvPr id="6" name="Text Box 5"/>
-          <p:cNvSpPr txBox="1"/>
-          <p:nvPr/>
-        </p:nvSpPr>
-        <p:spPr>
-          <a:xfrm>
-            <a:off x="502920" y="6510020"/>
-            <a:ext cx="5029200" cy="122555"/>
-          </a:xfrm>
-          <a:prstGeom prst="rect">
-            <a:avLst/>
-          </a:prstGeom>
-          <a:noFill/>
-        </p:spPr>
-        <p:txBody>
-          <a:bodyPr wrap="square" lIns="0" tIns="0" rIns="0" bIns="0" rtlCol="0" anchor="t">
-            <a:spAutoFit/>
-          </a:bodyPr>
-          <a:p>
-            <a:pPr algn="l"/>
-            <a:r>
-              <a:rPr lang="en-US" sz="800">
-                <a:solidFill>
-                  <a:srgbClr val="6F818D"/>
-                </a:solidFill>
-                <a:latin typeface="Aptos" charset="0"/>
-                <a:cs typeface="Aptos" charset="0"/>
-              </a:rPr>
-              <a:t>SYSTEM OVERVIEW  â€¢  2026</a:t>
-            </a:r>
-            <a:endParaRPr lang="en-US" sz="800">
-              <a:solidFill>
-                <a:srgbClr val="6F818D"/>
-              </a:solidFill>
-              <a:latin typeface="Aptos" charset="0"/>
-              <a:cs typeface="Aptos" charset="0"/>
-            </a:endParaRPr>
-          </a:p>
-        </p:txBody>
-      </p:sp>
-      <p:sp>
-        <p:nvSpPr>
-          <p:cNvPr id="7" name="Text Box 6"/>
-          <p:cNvSpPr txBox="1"/>
-          <p:nvPr/>
-        </p:nvSpPr>
-        <p:spPr>
-          <a:xfrm>
-            <a:off x="11018520" y="6492240"/>
-            <a:ext cx="657860" cy="138430"/>
-          </a:xfrm>
-          <a:prstGeom prst="rect">
-            <a:avLst/>
-          </a:prstGeom>
-          <a:noFill/>
-        </p:spPr>
-        <p:txBody>
-          <a:bodyPr wrap="square" lIns="0" tIns="0" rIns="0" bIns="0" rtlCol="0" anchor="t">
-            <a:spAutoFit/>
-          </a:bodyPr>
-          <a:p>
-            <a:pPr algn="r"/>
-            <a:r>
-              <a:rPr lang="en-US" sz="900" b="1">
-                <a:solidFill>
-                  <a:srgbClr val="EE2A3A"/>
-                </a:solidFill>
-                <a:latin typeface="Aptos" charset="0"/>
-                <a:cs typeface="Aptos" charset="0"/>
-              </a:rPr>
-              <a:t>05</a:t>
-            </a:r>
-            <a:endParaRPr lang="en-US" sz="900" b="1">
-              <a:solidFill>
-                <a:srgbClr val="EE2A3A"/>
-              </a:solidFill>
-              <a:latin typeface="Aptos" charset="0"/>
-              <a:cs typeface="Aptos" charset="0"/>
-            </a:endParaRPr>
-          </a:p>
-        </p:txBody>
-      </p:sp>
-      <p:sp>
-        <p:nvSpPr>
-          <p:cNvPr id="8" name="Text Box 7"/>
-          <p:cNvSpPr txBox="1"/>
-          <p:nvPr/>
-        </p:nvSpPr>
-        <p:spPr>
-          <a:xfrm>
-            <a:off x="502920" y="1023620"/>
-            <a:ext cx="10515600" cy="415290"/>
-          </a:xfrm>
-          <a:prstGeom prst="rect">
-            <a:avLst/>
-          </a:prstGeom>
-          <a:noFill/>
-        </p:spPr>
-        <p:txBody>
-          <a:bodyPr wrap="square" lIns="0" tIns="0" rIns="0" bIns="0" rtlCol="0" anchor="t">
-            <a:spAutoFit/>
-          </a:bodyPr>
-          <a:p>
-            <a:pPr algn="l"/>
-            <a:r>
-              <a:rPr lang="en-US" sz="2700" b="1">
-                <a:solidFill>
-                  <a:srgbClr val="F2F6F8"/>
-                </a:solidFill>
-                <a:latin typeface="Aptos" charset="0"/>
-                <a:cs typeface="Aptos" charset="0"/>
-              </a:rPr>
-              <a:t>A web app with a connected backend.</a:t>
-            </a:r>
-            <a:endParaRPr lang="en-US" sz="2700" b="1">
-              <a:solidFill>
-                <a:srgbClr val="F2F6F8"/>
-              </a:solidFill>
-              <a:latin typeface="Aptos" charset="0"/>
-              <a:cs typeface="Aptos" charset="0"/>
-            </a:endParaRPr>
-          </a:p>
-        </p:txBody>
-      </p:sp>
-      <p:sp>
-        <p:nvSpPr>
-          <p:cNvPr id="9" name="Text Box 8"/>
-          <p:cNvSpPr txBox="1"/>
-          <p:nvPr/>
-        </p:nvSpPr>
-        <p:spPr>
-          <a:xfrm>
-            <a:off x="502920" y="1627505"/>
-            <a:ext cx="10332720" cy="215265"/>
-          </a:xfrm>
-          <a:prstGeom prst="rect">
-            <a:avLst/>
-          </a:prstGeom>
-          <a:noFill/>
-        </p:spPr>
-        <p:txBody>
-          <a:bodyPr wrap="square" lIns="0" tIns="0" rIns="0" bIns="0" rtlCol="0" anchor="t">
-            <a:spAutoFit/>
-          </a:bodyPr>
-          <a:p>
-            <a:pPr algn="l"/>
-            <a:r>
-              <a:rPr lang="en-US" sz="1400">
-                <a:solidFill>
-                  <a:srgbClr val="AEBCC6"/>
-                </a:solidFill>
-                <a:latin typeface="Aptos" charset="0"/>
-                <a:cs typeface="Aptos" charset="0"/>
-              </a:rPr>
-              <a:t>The browser experience and gym data services work together.</a:t>
-            </a:r>
-            <a:endParaRPr lang="en-US" sz="1400">
-              <a:solidFill>
-                <a:srgbClr val="AEBCC6"/>
-              </a:solidFill>
-              <a:latin typeface="Aptos" charset="0"/>
-              <a:cs typeface="Aptos" charset="0"/>
-            </a:endParaRPr>
-          </a:p>
-        </p:txBody>
-      </p:sp>
-      <p:sp>
-        <p:nvSpPr>
-          <p:cNvPr id="10" name="Rounded Rectangle 9"/>
-          <p:cNvSpPr/>
-          <p:nvPr/>
-        </p:nvSpPr>
-        <p:spPr>
-          <a:xfrm>
-            <a:off x="502920" y="2514600"/>
-            <a:ext cx="2486660" cy="1572260"/>
-          </a:xfrm>
-          <a:prstGeom prst="roundRect">
-            <a:avLst/>
-          </a:prstGeom>
-          <a:solidFill>
-            <a:srgbClr val="0F161C"/>
-          </a:solidFill>
-          <a:ln w="12700">
-            <a:solidFill>
-              <a:srgbClr val="25333C"/>
-            </a:solidFill>
-          </a:ln>
-        </p:spPr>
-        <p:style>
-          <a:lnRef idx="2">
-            <a:schemeClr val="accent1">
-              <a:lumMod val="75000"/>
-            </a:schemeClr>
-          </a:lnRef>
-          <a:fillRef idx="1">
-            <a:schemeClr val="accent1"/>
-          </a:fillRef>
-          <a:effectRef idx="0">
-            <a:srgbClr val="FFFFFF"/>
-          </a:effectRef>
-          <a:fontRef idx="minor">
-            <a:schemeClr val="lt1"/>
-          </a:fontRef>
-        </p:style>
-        <p:txBody>
-          <a:bodyPr rtlCol="0" anchor="ctr"/>
-          <a:p>
-            <a:pPr algn="ctr"/>
-            <a:endParaRPr lang="en-US"/>
-          </a:p>
-        </p:txBody>
-      </p:sp>
-      <p:sp>
-        <p:nvSpPr>
-          <p:cNvPr id="11" name="Text Box 10"/>
-          <p:cNvSpPr txBox="1"/>
-          <p:nvPr/>
-        </p:nvSpPr>
-        <p:spPr>
-          <a:xfrm>
-            <a:off x="685800" y="2733675"/>
-            <a:ext cx="2103120" cy="138430"/>
-          </a:xfrm>
-          <a:prstGeom prst="rect">
-            <a:avLst/>
-          </a:prstGeom>
-          <a:noFill/>
-        </p:spPr>
-        <p:txBody>
-          <a:bodyPr wrap="square" lIns="0" tIns="0" rIns="0" bIns="0" rtlCol="0" anchor="t">
-            <a:spAutoFit/>
-          </a:bodyPr>
-          <a:p>
-            <a:pPr algn="l"/>
-            <a:r>
-              <a:rPr lang="en-US" sz="900" b="1">
-                <a:solidFill>
-                  <a:srgbClr val="EE2A3A"/>
-                </a:solidFill>
-                <a:latin typeface="Aptos" charset="0"/>
-                <a:cs typeface="Aptos" charset="0"/>
-              </a:rPr>
-              <a:t>PEOPLE</a:t>
-            </a:r>
-            <a:endParaRPr lang="en-US" sz="900" b="1">
-              <a:solidFill>
-                <a:srgbClr val="EE2A3A"/>
-              </a:solidFill>
-              <a:latin typeface="Aptos" charset="0"/>
-              <a:cs typeface="Aptos" charset="0"/>
-            </a:endParaRPr>
-          </a:p>
-        </p:txBody>
-      </p:sp>
-      <p:sp>
-        <p:nvSpPr>
-          <p:cNvPr id="12" name="Text Box 11"/>
-          <p:cNvSpPr txBox="1"/>
-          <p:nvPr/>
-        </p:nvSpPr>
-        <p:spPr>
-          <a:xfrm>
-            <a:off x="685800" y="3126740"/>
-            <a:ext cx="2148840" cy="260985"/>
-          </a:xfrm>
-          <a:prstGeom prst="rect">
-            <a:avLst/>
-          </a:prstGeom>
-          <a:noFill/>
-        </p:spPr>
-        <p:txBody>
-          <a:bodyPr wrap="square" lIns="0" tIns="0" rIns="0" bIns="0" rtlCol="0" anchor="t">
-            <a:spAutoFit/>
-          </a:bodyPr>
-          <a:p>
-            <a:pPr algn="l"/>
-            <a:r>
-              <a:rPr lang="en-US" sz="1700" b="1">
-                <a:solidFill>
-                  <a:srgbClr val="F2F6F8"/>
-                </a:solidFill>
-                <a:latin typeface="Aptos" charset="0"/>
-                <a:cs typeface="Aptos" charset="0"/>
-              </a:rPr>
-              <a:t>Member &amp; staff</a:t>
-            </a:r>
-            <a:endParaRPr lang="en-US" sz="1700" b="1">
-              <a:solidFill>
-                <a:srgbClr val="F2F6F8"/>
-              </a:solidFill>
-              <a:latin typeface="Aptos" charset="0"/>
-              <a:cs typeface="Aptos" charset="0"/>
-            </a:endParaRPr>
-          </a:p>
-        </p:txBody>
-      </p:sp>
-      <p:sp>
-        <p:nvSpPr>
-          <p:cNvPr id="13" name="Text Box 12"/>
-          <p:cNvSpPr txBox="1"/>
-          <p:nvPr/>
-        </p:nvSpPr>
-        <p:spPr>
-          <a:xfrm>
-            <a:off x="685800" y="3575050"/>
-            <a:ext cx="2176145" cy="153670"/>
-          </a:xfrm>
-          <a:prstGeom prst="rect">
-            <a:avLst/>
-          </a:prstGeom>
-          <a:noFill/>
-        </p:spPr>
-        <p:txBody>
-          <a:bodyPr wrap="square" lIns="0" tIns="0" rIns="0" bIns="0" rtlCol="0" anchor="t">
-            <a:spAutoFit/>
-          </a:bodyPr>
-          <a:p>
-            <a:pPr algn="l"/>
-            <a:r>
-              <a:rPr lang="en-US" sz="1000">
-                <a:solidFill>
-                  <a:srgbClr val="AEBCC6"/>
-                </a:solidFill>
-                <a:latin typeface="Aptos" charset="0"/>
-                <a:cs typeface="Aptos" charset="0"/>
-              </a:rPr>
-              <a:t>Phone or computer</a:t>
-            </a:r>
-            <a:endParaRPr lang="en-US" sz="1000">
-              <a:solidFill>
-                <a:srgbClr val="AEBCC6"/>
-              </a:solidFill>
-              <a:latin typeface="Aptos" charset="0"/>
-              <a:cs typeface="Aptos" charset="0"/>
-            </a:endParaRPr>
-          </a:p>
-        </p:txBody>
-      </p:sp>
-      <p:sp>
-        <p:nvSpPr>
-          <p:cNvPr id="14" name="Rounded Rectangle 13"/>
-          <p:cNvSpPr/>
-          <p:nvPr/>
-        </p:nvSpPr>
-        <p:spPr>
-          <a:xfrm>
-            <a:off x="3401060" y="2514600"/>
-            <a:ext cx="2487295" cy="1572260"/>
-          </a:xfrm>
-          <a:prstGeom prst="roundRect">
-            <a:avLst/>
-          </a:prstGeom>
-          <a:solidFill>
-            <a:srgbClr val="0F161C"/>
-          </a:solidFill>
-          <a:ln w="12700">
-            <a:solidFill>
-              <a:srgbClr val="25333C"/>
-            </a:solidFill>
-          </a:ln>
-        </p:spPr>
-        <p:style>
-          <a:lnRef idx="2">
-            <a:schemeClr val="accent1">
-              <a:lumMod val="75000"/>
-            </a:schemeClr>
-          </a:lnRef>
-          <a:fillRef idx="1">
-            <a:schemeClr val="accent1"/>
-          </a:fillRef>
-          <a:effectRef idx="0">
-            <a:srgbClr val="FFFFFF"/>
-          </a:effectRef>
-          <a:fontRef idx="minor">
-            <a:schemeClr val="lt1"/>
-          </a:fontRef>
-        </p:style>
-        <p:txBody>
-          <a:bodyPr rtlCol="0" anchor="ctr"/>
-          <a:p>
-            <a:pPr algn="ctr"/>
-            <a:endParaRPr lang="en-US"/>
-          </a:p>
-        </p:txBody>
-      </p:sp>
-      <p:sp>
-        <p:nvSpPr>
-          <p:cNvPr id="15" name="Text Box 14"/>
-          <p:cNvSpPr txBox="1"/>
-          <p:nvPr/>
-        </p:nvSpPr>
-        <p:spPr>
-          <a:xfrm>
-            <a:off x="3583940" y="2733675"/>
-            <a:ext cx="2103120" cy="138430"/>
-          </a:xfrm>
-          <a:prstGeom prst="rect">
-            <a:avLst/>
-          </a:prstGeom>
-          <a:noFill/>
-        </p:spPr>
-        <p:txBody>
-          <a:bodyPr wrap="square" lIns="0" tIns="0" rIns="0" bIns="0" rtlCol="0" anchor="t">
-            <a:spAutoFit/>
-          </a:bodyPr>
-          <a:p>
-            <a:pPr algn="l"/>
-            <a:r>
-              <a:rPr lang="en-US" sz="900" b="1">
-                <a:solidFill>
-                  <a:srgbClr val="5EAEFF"/>
-                </a:solidFill>
-                <a:latin typeface="Aptos" charset="0"/>
-                <a:cs typeface="Aptos" charset="0"/>
-              </a:rPr>
-              <a:t>WEB</a:t>
-            </a:r>
-            <a:endParaRPr lang="en-US" sz="900" b="1">
-              <a:solidFill>
-                <a:srgbClr val="5EAEFF"/>
-              </a:solidFill>
-              <a:latin typeface="Aptos" charset="0"/>
-              <a:cs typeface="Aptos" charset="0"/>
-            </a:endParaRPr>
-          </a:p>
-        </p:txBody>
-      </p:sp>
-      <p:sp>
-        <p:nvSpPr>
-          <p:cNvPr id="16" name="Text Box 15"/>
-          <p:cNvSpPr txBox="1"/>
-          <p:nvPr/>
-        </p:nvSpPr>
-        <p:spPr>
-          <a:xfrm>
-            <a:off x="3583940" y="3126740"/>
-            <a:ext cx="2148840" cy="260985"/>
-          </a:xfrm>
-          <a:prstGeom prst="rect">
-            <a:avLst/>
-          </a:prstGeom>
-          <a:noFill/>
-        </p:spPr>
-        <p:txBody>
-          <a:bodyPr wrap="square" lIns="0" tIns="0" rIns="0" bIns="0" rtlCol="0" anchor="t">
-            <a:spAutoFit/>
-          </a:bodyPr>
-          <a:p>
-            <a:pPr algn="l"/>
-            <a:r>
-              <a:rPr lang="en-US" sz="1700" b="1">
-                <a:solidFill>
-                  <a:srgbClr val="F2F6F8"/>
-                </a:solidFill>
-                <a:latin typeface="Aptos" charset="0"/>
-                <a:cs typeface="Aptos" charset="0"/>
-              </a:rPr>
-              <a:t>Frontend</a:t>
-            </a:r>
-            <a:endParaRPr lang="en-US" sz="1700" b="1">
-              <a:solidFill>
-                <a:srgbClr val="F2F6F8"/>
-              </a:solidFill>
-              <a:latin typeface="Aptos" charset="0"/>
-              <a:cs typeface="Aptos" charset="0"/>
-            </a:endParaRPr>
-          </a:p>
-        </p:txBody>
-      </p:sp>
-      <p:sp>
-        <p:nvSpPr>
-          <p:cNvPr id="17" name="Text Box 16"/>
-          <p:cNvSpPr txBox="1"/>
-          <p:nvPr/>
-        </p:nvSpPr>
-        <p:spPr>
-          <a:xfrm>
-            <a:off x="3583940" y="3575050"/>
-            <a:ext cx="2176145" cy="153670"/>
-          </a:xfrm>
-          <a:prstGeom prst="rect">
-            <a:avLst/>
-          </a:prstGeom>
-          <a:noFill/>
-        </p:spPr>
-        <p:txBody>
-          <a:bodyPr wrap="square" lIns="0" tIns="0" rIns="0" bIns="0" rtlCol="0" anchor="t">
-            <a:spAutoFit/>
-          </a:bodyPr>
-          <a:p>
-            <a:pPr algn="l"/>
-            <a:r>
-              <a:rPr lang="en-US" sz="1000">
-                <a:solidFill>
-                  <a:srgbClr val="AEBCC6"/>
-                </a:solidFill>
-                <a:latin typeface="Aptos" charset="0"/>
-                <a:cs typeface="Aptos" charset="0"/>
-              </a:rPr>
-              <a:t>Vercel</a:t>
-            </a:r>
-            <a:endParaRPr lang="en-US" sz="1000">
-              <a:solidFill>
-                <a:srgbClr val="AEBCC6"/>
-              </a:solidFill>
-              <a:latin typeface="Aptos" charset="0"/>
-              <a:cs typeface="Aptos" charset="0"/>
-            </a:endParaRPr>
-          </a:p>
-        </p:txBody>
-      </p:sp>
-      <p:sp>
-        <p:nvSpPr>
-          <p:cNvPr id="18" name="Rounded Rectangle 17"/>
-          <p:cNvSpPr/>
-          <p:nvPr/>
-        </p:nvSpPr>
-        <p:spPr>
-          <a:xfrm>
-            <a:off x="6299835" y="2514600"/>
-            <a:ext cx="2487295" cy="1572260"/>
-          </a:xfrm>
-          <a:prstGeom prst="roundRect">
-            <a:avLst/>
-          </a:prstGeom>
-          <a:solidFill>
-            <a:srgbClr val="0F161C"/>
-          </a:solidFill>
-          <a:ln w="12700">
-            <a:solidFill>
-              <a:srgbClr val="25333C"/>
-            </a:solidFill>
-          </a:ln>
-        </p:spPr>
-        <p:style>
-          <a:lnRef idx="2">
-            <a:schemeClr val="accent1">
-              <a:lumMod val="75000"/>
-            </a:schemeClr>
-          </a:lnRef>
-          <a:fillRef idx="1">
-            <a:schemeClr val="accent1"/>
-          </a:fillRef>
-          <a:effectRef idx="0">
-            <a:srgbClr val="FFFFFF"/>
-          </a:effectRef>
-          <a:fontRef idx="minor">
-            <a:schemeClr val="lt1"/>
-          </a:fontRef>
-        </p:style>
-        <p:txBody>
-          <a:bodyPr rtlCol="0" anchor="ctr"/>
-          <a:p>
-            <a:pPr algn="ctr"/>
-            <a:endParaRPr lang="en-US"/>
-          </a:p>
-        </p:txBody>
-      </p:sp>
-      <p:sp>
-        <p:nvSpPr>
-          <p:cNvPr id="19" name="Text Box 18"/>
-          <p:cNvSpPr txBox="1"/>
-          <p:nvPr/>
-        </p:nvSpPr>
-        <p:spPr>
-          <a:xfrm>
-            <a:off x="6482715" y="2733675"/>
-            <a:ext cx="2103120" cy="138430"/>
-          </a:xfrm>
-          <a:prstGeom prst="rect">
-            <a:avLst/>
-          </a:prstGeom>
-          <a:noFill/>
-        </p:spPr>
-        <p:txBody>
-          <a:bodyPr wrap="square" lIns="0" tIns="0" rIns="0" bIns="0" rtlCol="0" anchor="t">
-            <a:spAutoFit/>
-          </a:bodyPr>
-          <a:p>
-            <a:pPr algn="l"/>
-            <a:r>
-              <a:rPr lang="en-US" sz="900" b="1">
-                <a:solidFill>
-                  <a:srgbClr val="26D58B"/>
-                </a:solidFill>
-                <a:latin typeface="Aptos" charset="0"/>
-                <a:cs typeface="Aptos" charset="0"/>
-              </a:rPr>
-              <a:t>API</a:t>
-            </a:r>
-            <a:endParaRPr lang="en-US" sz="900" b="1">
-              <a:solidFill>
-                <a:srgbClr val="26D58B"/>
-              </a:solidFill>
-              <a:latin typeface="Aptos" charset="0"/>
-              <a:cs typeface="Aptos" charset="0"/>
-            </a:endParaRPr>
-          </a:p>
-        </p:txBody>
-      </p:sp>
-      <p:sp>
-        <p:nvSpPr>
-          <p:cNvPr id="20" name="Text Box 19"/>
-          <p:cNvSpPr txBox="1"/>
-          <p:nvPr/>
-        </p:nvSpPr>
-        <p:spPr>
-          <a:xfrm>
-            <a:off x="6482715" y="3126740"/>
-            <a:ext cx="2148840" cy="260985"/>
-          </a:xfrm>
-          <a:prstGeom prst="rect">
-            <a:avLst/>
-          </a:prstGeom>
-          <a:noFill/>
-        </p:spPr>
-        <p:txBody>
-          <a:bodyPr wrap="square" lIns="0" tIns="0" rIns="0" bIns="0" rtlCol="0" anchor="t">
-            <a:spAutoFit/>
-          </a:bodyPr>
-          <a:p>
-            <a:pPr algn="l"/>
-            <a:r>
-              <a:rPr lang="en-US" sz="1700" b="1">
-                <a:solidFill>
-                  <a:srgbClr val="F2F6F8"/>
-                </a:solidFill>
-                <a:latin typeface="Aptos" charset="0"/>
-                <a:cs typeface="Aptos" charset="0"/>
-              </a:rPr>
-              <a:t>Application server</a:t>
-            </a:r>
-            <a:endParaRPr lang="en-US" sz="1700" b="1">
-              <a:solidFill>
-                <a:srgbClr val="F2F6F8"/>
-              </a:solidFill>
-              <a:latin typeface="Aptos" charset="0"/>
-              <a:cs typeface="Aptos" charset="0"/>
-            </a:endParaRPr>
-          </a:p>
-        </p:txBody>
-      </p:sp>
-      <p:sp>
-        <p:nvSpPr>
-          <p:cNvPr id="21" name="Text Box 20"/>
-          <p:cNvSpPr txBox="1"/>
-          <p:nvPr/>
-        </p:nvSpPr>
-        <p:spPr>
-          <a:xfrm>
-            <a:off x="6482715" y="3575050"/>
-            <a:ext cx="2176145" cy="153670"/>
-          </a:xfrm>
-          <a:prstGeom prst="rect">
-            <a:avLst/>
-          </a:prstGeom>
-          <a:noFill/>
-        </p:spPr>
-        <p:txBody>
-          <a:bodyPr wrap="square" lIns="0" tIns="0" rIns="0" bIns="0" rtlCol="0" anchor="t">
-            <a:spAutoFit/>
-          </a:bodyPr>
-          <a:p>
-            <a:pPr algn="l"/>
-            <a:r>
-              <a:rPr lang="en-US" sz="1000">
-                <a:solidFill>
-                  <a:srgbClr val="AEBCC6"/>
-                </a:solidFill>
-                <a:latin typeface="Aptos" charset="0"/>
-                <a:cs typeface="Aptos" charset="0"/>
-              </a:rPr>
-              <a:t>Node.js / Express Â· Render</a:t>
-            </a:r>
-            <a:endParaRPr lang="en-US" sz="1000">
-              <a:solidFill>
-                <a:srgbClr val="AEBCC6"/>
-              </a:solidFill>
-              <a:latin typeface="Aptos" charset="0"/>
-              <a:cs typeface="Aptos" charset="0"/>
-            </a:endParaRPr>
-          </a:p>
-        </p:txBody>
-      </p:sp>
-      <p:sp>
-        <p:nvSpPr>
-          <p:cNvPr id="22" name="Rounded Rectangle 21"/>
-          <p:cNvSpPr/>
-          <p:nvPr/>
-        </p:nvSpPr>
-        <p:spPr>
-          <a:xfrm>
-            <a:off x="9198610" y="2514600"/>
-            <a:ext cx="2487295" cy="1572260"/>
-          </a:xfrm>
-          <a:prstGeom prst="roundRect">
-            <a:avLst/>
-          </a:prstGeom>
-          <a:solidFill>
-            <a:srgbClr val="0F161C"/>
-          </a:solidFill>
-          <a:ln w="12700">
-            <a:solidFill>
-              <a:srgbClr val="25333C"/>
-            </a:solidFill>
-          </a:ln>
-        </p:spPr>
-        <p:style>
-          <a:lnRef idx="2">
-            <a:schemeClr val="accent1">
-              <a:lumMod val="75000"/>
-            </a:schemeClr>
-          </a:lnRef>
-          <a:fillRef idx="1">
-            <a:schemeClr val="accent1"/>
-          </a:fillRef>
-          <a:effectRef idx="0">
-            <a:srgbClr val="FFFFFF"/>
-          </a:effectRef>
-          <a:fontRef idx="minor">
-            <a:schemeClr val="lt1"/>
-          </a:fontRef>
-        </p:style>
-        <p:txBody>
-          <a:bodyPr rtlCol="0" anchor="ctr"/>
-          <a:p>
-            <a:pPr algn="ctr"/>
-            <a:endParaRPr lang="en-US"/>
-          </a:p>
-        </p:txBody>
-      </p:sp>
-      <p:sp>
-        <p:nvSpPr>
-          <p:cNvPr id="23" name="Text Box 22"/>
-          <p:cNvSpPr txBox="1"/>
-          <p:nvPr/>
-        </p:nvSpPr>
-        <p:spPr>
-          <a:xfrm>
-            <a:off x="9381490" y="2733675"/>
-            <a:ext cx="2103120" cy="138430"/>
-          </a:xfrm>
-          <a:prstGeom prst="rect">
-            <a:avLst/>
-          </a:prstGeom>
-          <a:noFill/>
-        </p:spPr>
-        <p:txBody>
-          <a:bodyPr wrap="square" lIns="0" tIns="0" rIns="0" bIns="0" rtlCol="0" anchor="t">
-            <a:spAutoFit/>
-          </a:bodyPr>
-          <a:p>
-            <a:pPr algn="l"/>
-            <a:r>
-              <a:rPr lang="en-US" sz="900" b="1">
-                <a:solidFill>
-                  <a:srgbClr val="EE2A3A"/>
-                </a:solidFill>
-                <a:latin typeface="Aptos" charset="0"/>
-                <a:cs typeface="Aptos" charset="0"/>
-              </a:rPr>
-              <a:t>DATA</a:t>
-            </a:r>
-            <a:endParaRPr lang="en-US" sz="900" b="1">
-              <a:solidFill>
-                <a:srgbClr val="EE2A3A"/>
-              </a:solidFill>
-              <a:latin typeface="Aptos" charset="0"/>
-              <a:cs typeface="Aptos" charset="0"/>
-            </a:endParaRPr>
-          </a:p>
-        </p:txBody>
-      </p:sp>
-      <p:sp>
-        <p:nvSpPr>
-          <p:cNvPr id="24" name="Text Box 23"/>
-          <p:cNvSpPr txBox="1"/>
-          <p:nvPr/>
-        </p:nvSpPr>
-        <p:spPr>
-          <a:xfrm>
-            <a:off x="9381490" y="3126740"/>
-            <a:ext cx="2148840" cy="260985"/>
-          </a:xfrm>
-          <a:prstGeom prst="rect">
-            <a:avLst/>
-          </a:prstGeom>
-          <a:noFill/>
-        </p:spPr>
-        <p:txBody>
-          <a:bodyPr wrap="square" lIns="0" tIns="0" rIns="0" bIns="0" rtlCol="0" anchor="t">
-            <a:spAutoFit/>
-          </a:bodyPr>
-          <a:p>
-            <a:pPr algn="l"/>
-            <a:r>
-              <a:rPr lang="en-US" sz="1700" b="1">
-                <a:solidFill>
-                  <a:srgbClr val="F2F6F8"/>
-                </a:solidFill>
-                <a:latin typeface="Aptos" charset="0"/>
-                <a:cs typeface="Aptos" charset="0"/>
-              </a:rPr>
-              <a:t>Database</a:t>
-            </a:r>
-            <a:endParaRPr lang="en-US" sz="1700" b="1">
-              <a:solidFill>
-                <a:srgbClr val="F2F6F8"/>
-              </a:solidFill>
-              <a:latin typeface="Aptos" charset="0"/>
-              <a:cs typeface="Aptos" charset="0"/>
-            </a:endParaRPr>
-          </a:p>
-        </p:txBody>
-      </p:sp>
-      <p:sp>
-        <p:nvSpPr>
-          <p:cNvPr id="25" name="Text Box 24"/>
-          <p:cNvSpPr txBox="1"/>
-          <p:nvPr/>
-        </p:nvSpPr>
-        <p:spPr>
-          <a:xfrm>
-            <a:off x="9381490" y="3575050"/>
-            <a:ext cx="2176145" cy="153670"/>
-          </a:xfrm>
-          <a:prstGeom prst="rect">
-            <a:avLst/>
-          </a:prstGeom>
-          <a:noFill/>
-        </p:spPr>
-        <p:txBody>
-          <a:bodyPr wrap="square" lIns="0" tIns="0" rIns="0" bIns="0" rtlCol="0" anchor="t">
-            <a:spAutoFit/>
-          </a:bodyPr>
-          <a:p>
-            <a:pPr algn="l"/>
-            <a:r>
-              <a:rPr lang="en-US" sz="1000">
-                <a:solidFill>
-                  <a:srgbClr val="AEBCC6"/>
-                </a:solidFill>
-                <a:latin typeface="Aptos" charset="0"/>
-                <a:cs typeface="Aptos" charset="0"/>
-              </a:rPr>
-              <a:t>PostgreSQL</a:t>
-            </a:r>
-            <a:endParaRPr lang="en-US" sz="1000">
-              <a:solidFill>
-                <a:srgbClr val="AEBCC6"/>
-              </a:solidFill>
-              <a:latin typeface="Aptos" charset="0"/>
-              <a:cs typeface="Aptos" charset="0"/>
-            </a:endParaRPr>
-          </a:p>
-        </p:txBody>
-      </p:sp>
-      <p:cxnSp>
-        <p:nvCxnSpPr>
-          <p:cNvPr id="26" name="Straight Connector 25"/>
-          <p:cNvCxnSpPr/>
-          <p:nvPr/>
-        </p:nvCxnSpPr>
-        <p:spPr>
-          <a:xfrm>
-            <a:off x="3007995" y="3300730"/>
-            <a:ext cx="328930" cy="635"/>
-          </a:xfrm>
-          <a:prstGeom prst="line">
-            <a:avLst/>
-          </a:prstGeom>
-          <a:ln w="25400">
-            <a:solidFill>
-              <a:srgbClr val="5B6C77"/>
-            </a:solidFill>
-          </a:ln>
-        </p:spPr>
-        <p:style>
-          <a:lnRef idx="2">
-            <a:schemeClr val="accent1"/>
-          </a:lnRef>
-          <a:fillRef idx="0">
-            <a:srgbClr val="FFFFFF"/>
-          </a:fillRef>
-          <a:effectRef idx="0">
-            <a:srgbClr val="FFFFFF"/>
-          </a:effectRef>
-          <a:fontRef idx="minor">
-            <a:schemeClr val="tx1"/>
-          </a:fontRef>
-        </p:style>
-      </p:cxnSp>
-      <p:cxnSp>
-        <p:nvCxnSpPr>
-          <p:cNvPr id="27" name="Straight Connector 26"/>
-          <p:cNvCxnSpPr/>
-          <p:nvPr/>
-        </p:nvCxnSpPr>
-        <p:spPr>
-          <a:xfrm>
-            <a:off x="5906770" y="3300730"/>
-            <a:ext cx="328930" cy="635"/>
-          </a:xfrm>
-          <a:prstGeom prst="line">
-            <a:avLst/>
-          </a:prstGeom>
-          <a:ln w="25400">
-            <a:solidFill>
-              <a:srgbClr val="5B6C77"/>
-            </a:solidFill>
-          </a:ln>
-        </p:spPr>
-        <p:style>
-          <a:lnRef idx="2">
-            <a:schemeClr val="accent1"/>
-          </a:lnRef>
-          <a:fillRef idx="0">
-            <a:srgbClr val="FFFFFF"/>
-          </a:fillRef>
-          <a:effectRef idx="0">
-            <a:srgbClr val="FFFFFF"/>
-          </a:effectRef>
-          <a:fontRef idx="minor">
-            <a:schemeClr val="tx1"/>
-          </a:fontRef>
-        </p:style>
-      </p:cxnSp>
-      <p:cxnSp>
-        <p:nvCxnSpPr>
-          <p:cNvPr id="28" name="Straight Connector 27"/>
-          <p:cNvCxnSpPr/>
-          <p:nvPr/>
-        </p:nvCxnSpPr>
-        <p:spPr>
-          <a:xfrm>
-            <a:off x="8805545" y="3300730"/>
-            <a:ext cx="328930" cy="635"/>
-          </a:xfrm>
-          <a:prstGeom prst="line">
-            <a:avLst/>
-          </a:prstGeom>
-          <a:ln w="25400">
-            <a:solidFill>
-              <a:srgbClr val="5B6C77"/>
-            </a:solidFill>
-          </a:ln>
-        </p:spPr>
-        <p:style>
-          <a:lnRef idx="2">
-            <a:schemeClr val="accent1"/>
-          </a:lnRef>
-          <a:fillRef idx="0">
-            <a:srgbClr val="FFFFFF"/>
-          </a:fillRef>
-          <a:effectRef idx="0">
-            <a:srgbClr val="FFFFFF"/>
-          </a:effectRef>
-          <a:fontRef idx="minor">
-            <a:schemeClr val="tx1"/>
-          </a:fontRef>
-        </p:style>
-      </p:cxnSp>
-      <p:sp>
-        <p:nvSpPr>
-          <p:cNvPr id="29" name="Rounded Rectangle 28"/>
-          <p:cNvSpPr/>
-          <p:nvPr/>
-        </p:nvSpPr>
-        <p:spPr>
-          <a:xfrm>
-            <a:off x="502920" y="4617720"/>
-            <a:ext cx="11173460" cy="960120"/>
-          </a:xfrm>
-          <a:prstGeom prst="roundRect">
-            <a:avLst/>
-          </a:prstGeom>
-          <a:solidFill>
-            <a:srgbClr val="131D24"/>
-          </a:solidFill>
-          <a:ln w="12700">
-            <a:solidFill>
-              <a:srgbClr val="25333C"/>
-            </a:solidFill>
-          </a:ln>
-        </p:spPr>
-        <p:style>
-          <a:lnRef idx="2">
-            <a:schemeClr val="accent1">
-              <a:lumMod val="75000"/>
-            </a:schemeClr>
-          </a:lnRef>
-          <a:fillRef idx="1">
-            <a:schemeClr val="accent1"/>
-          </a:fillRef>
-          <a:effectRef idx="0">
-            <a:srgbClr val="FFFFFF"/>
-          </a:effectRef>
-          <a:fontRef idx="minor">
-            <a:schemeClr val="lt1"/>
-          </a:fontRef>
-        </p:style>
-        <p:txBody>
-          <a:bodyPr rtlCol="0" anchor="ctr"/>
-          <a:p>
-            <a:pPr algn="ctr"/>
-            <a:endParaRPr lang="en-US"/>
-          </a:p>
-        </p:txBody>
-      </p:sp>
-      <p:sp>
-        <p:nvSpPr>
-          <p:cNvPr id="30" name="Text Box 29"/>
-          <p:cNvSpPr txBox="1"/>
-          <p:nvPr/>
-        </p:nvSpPr>
-        <p:spPr>
-          <a:xfrm>
-            <a:off x="795020" y="4928235"/>
-            <a:ext cx="10561320" cy="230505"/>
-          </a:xfrm>
-          <a:prstGeom prst="rect">
-            <a:avLst/>
-          </a:prstGeom>
-          <a:noFill/>
-        </p:spPr>
-        <p:txBody>
-          <a:bodyPr wrap="square" lIns="0" tIns="0" rIns="0" bIns="0" rtlCol="0" anchor="t">
-            <a:spAutoFit/>
-          </a:bodyPr>
-          <a:p>
-            <a:pPr algn="ctr"/>
-            <a:r>
-              <a:rPr lang="en-US" sz="1500" b="1">
-                <a:solidFill>
-                  <a:srgbClr val="F2F6F8"/>
-                </a:solidFill>
-                <a:latin typeface="Aptos" charset="0"/>
-                <a:cs typeface="Aptos" charset="0"/>
-              </a:rPr>
-              <a:t>ONE PLACE TO MANAGE MEMBERSHIP, ATTENDANCE, AND DAILY GYM OPERATIONS.</a:t>
-            </a:r>
-            <a:endParaRPr lang="en-US" sz="1500" b="1">
-              <a:solidFill>
-                <a:srgbClr val="F2F6F8"/>
-              </a:solidFill>
-              <a:latin typeface="Aptos" charset="0"/>
-              <a:cs typeface="Aptos" charset="0"/>
-            </a:endParaRPr>
-          </a:p>
-        </p:txBody>
-      </p:sp>
-      <p:sp>
-        <p:nvSpPr>
-          <p:cNvPr id="31" name="Text Box 30"/>
-          <p:cNvSpPr txBox="1"/>
-          <p:nvPr/>
-        </p:nvSpPr>
-        <p:spPr>
-          <a:xfrm>
-            <a:off x="4114800" y="5796915"/>
-            <a:ext cx="3931920" cy="184150"/>
-          </a:xfrm>
-          <a:prstGeom prst="rect">
-            <a:avLst/>
-          </a:prstGeom>
-          <a:noFill/>
-        </p:spPr>
-        <p:txBody>
-          <a:bodyPr wrap="square" lIns="0" tIns="0" rIns="0" bIns="0" rtlCol="0" anchor="t">
-            <a:spAutoFit/>
-          </a:bodyPr>
-          <a:p>
-            <a:pPr algn="ctr"/>
-            <a:r>
-              <a:rPr lang="en-US" sz="1200" b="1">
-                <a:solidFill>
-                  <a:srgbClr val="EE2A3A"/>
-                </a:solidFill>
-                <a:latin typeface="Aptos" charset="0"/>
-                <a:cs typeface="Aptos" charset="0"/>
-              </a:rPr>
-              <a:t>ANCHOR GYM SYSTEM</a:t>
-            </a:r>
-            <a:endParaRPr lang="en-US" sz="1200" b="1">
-              <a:solidFill>
-                <a:srgbClr val="EE2A3A"/>
               </a:solidFill>
               <a:latin typeface="Aptos" charset="0"/>
               <a:cs typeface="Aptos" charset="0"/>
@@ -9435,4 +8529,263 @@
     </a:ext>
   </a:extLst>
 </a:theme>
+</file>
+
+<file path=ppt/theme/theme2.xml><?xml version="1.0" encoding="utf-8"?>
+<a:theme xmlns:a="http://schemas.openxmlformats.org/drawingml/2006/main" name="Office Theme">
+  <a:themeElements>
+    <a:clrScheme name="Office">
+      <a:dk1>
+        <a:sysClr val="windowText" lastClr="000000"/>
+      </a:dk1>
+      <a:lt1>
+        <a:sysClr val="window" lastClr="FFFFFF"/>
+      </a:lt1>
+      <a:dk2>
+        <a:srgbClr val="44546A"/>
+      </a:dk2>
+      <a:lt2>
+        <a:srgbClr val="E7E6E6"/>
+      </a:lt2>
+      <a:accent1>
+        <a:srgbClr val="5B9BD5"/>
+      </a:accent1>
+      <a:accent2>
+        <a:srgbClr val="ED7D31"/>
+      </a:accent2>
+      <a:accent3>
+        <a:srgbClr val="A5A5A5"/>
+      </a:accent3>
+      <a:accent4>
+        <a:srgbClr val="FFC000"/>
+      </a:accent4>
+      <a:accent5>
+        <a:srgbClr val="4472C4"/>
+      </a:accent5>
+      <a:accent6>
+        <a:srgbClr val="70AD47"/>
+      </a:accent6>
+      <a:hlink>
+        <a:srgbClr val="0563C1"/>
+      </a:hlink>
+      <a:folHlink>
+        <a:srgbClr val="954F72"/>
+      </a:folHlink>
+    </a:clrScheme>
+    <a:fontScheme name="Office">
+      <a:majorFont>
+        <a:latin typeface="Calibri Light"/>
+        <a:ea typeface=""/>
+        <a:cs typeface=""/>
+        <a:font script="Jpan" typeface="ＭＳ Ｐゴシック"/>
+        <a:font script="Hang" typeface="맑은 고딕"/>
+        <a:font script="Hans" typeface="宋体"/>
+        <a:font script="Hant" typeface="新細明體"/>
+        <a:font script="Arab" typeface="Times New Roman"/>
+        <a:font script="Hebr" typeface="Times New Roman"/>
+        <a:font script="Thai" typeface="Angsana New"/>
+        <a:font script="Ethi" typeface="Nyala"/>
+        <a:font script="Beng" typeface="Vrinda"/>
+        <a:font script="Gujr" typeface="Shruti"/>
+        <a:font script="Khmr" typeface="MoolBoran"/>
+        <a:font script="Knda" typeface="Tunga"/>
+        <a:font script="Guru" typeface="Raavi"/>
+        <a:font script="Cans" typeface="Euphemia"/>
+        <a:font script="Cher" typeface="Plantagenet Cherokee"/>
+        <a:font script="Yiii" typeface="Microsoft Yi Baiti"/>
+        <a:font script="Tibt" typeface="Microsoft Himalaya"/>
+        <a:font script="Thaa" typeface="MV Boli"/>
+        <a:font script="Deva" typeface="Mangal"/>
+        <a:font script="Telu" typeface="Gautami"/>
+        <a:font script="Taml" typeface="Latha"/>
+        <a:font script="Syrc" typeface="Estrangelo Edessa"/>
+        <a:font script="Orya" typeface="Kalinga"/>
+        <a:font script="Mlym" typeface="Kartika"/>
+        <a:font script="Laoo" typeface="DokChampa"/>
+        <a:font script="Sinh" typeface="Iskoola Pota"/>
+        <a:font script="Mong" typeface="Mongolian Baiti"/>
+        <a:font script="Viet" typeface="Times New Roman"/>
+        <a:font script="Uigh" typeface="Microsoft Uighur"/>
+        <a:font script="Geor" typeface="Sylfaen"/>
+      </a:majorFont>
+      <a:minorFont>
+        <a:latin typeface="Calibri"/>
+        <a:ea typeface=""/>
+        <a:cs typeface=""/>
+        <a:font script="Jpan" typeface="ＭＳ Ｐゴシック"/>
+        <a:font script="Hang" typeface="맑은 고딕"/>
+        <a:font script="Hans" typeface="宋体"/>
+        <a:font script="Hant" typeface="新細明體"/>
+        <a:font script="Arab" typeface="Arial"/>
+        <a:font script="Hebr" typeface="Arial"/>
+        <a:font script="Thai" typeface="Cordia New"/>
+        <a:font script="Ethi" typeface="Nyala"/>
+        <a:font script="Beng" typeface="Vrinda"/>
+        <a:font script="Gujr" typeface="Shruti"/>
+        <a:font script="Khmr" typeface="DaunPenh"/>
+        <a:font script="Knda" typeface="Tunga"/>
+        <a:font script="Guru" typeface="Raavi"/>
+        <a:font script="Cans" typeface="Euphemia"/>
+        <a:font script="Cher" typeface="Plantagenet Cherokee"/>
+        <a:font script="Yiii" typeface="Microsoft Yi Baiti"/>
+        <a:font script="Tibt" typeface="Microsoft Himalaya"/>
+        <a:font script="Thaa" typeface="MV Boli"/>
+        <a:font script="Deva" typeface="Mangal"/>
+        <a:font script="Telu" typeface="Gautami"/>
+        <a:font script="Taml" typeface="Latha"/>
+        <a:font script="Syrc" typeface="Estrangelo Edessa"/>
+        <a:font script="Orya" typeface="Kalinga"/>
+        <a:font script="Mlym" typeface="Kartika"/>
+        <a:font script="Laoo" typeface="DokChampa"/>
+        <a:font script="Sinh" typeface="Iskoola Pota"/>
+        <a:font script="Mong" typeface="Mongolian Baiti"/>
+        <a:font script="Viet" typeface="Arial"/>
+        <a:font script="Uigh" typeface="Microsoft Uighur"/>
+        <a:font script="Geor" typeface="Sylfaen"/>
+      </a:minorFont>
+    </a:fontScheme>
+    <a:fmtScheme name="Office">
+      <a:fillStyleLst>
+        <a:solidFill>
+          <a:schemeClr val="phClr"/>
+        </a:solidFill>
+        <a:gradFill rotWithShape="1">
+          <a:gsLst>
+            <a:gs pos="0">
+              <a:schemeClr val="phClr">
+                <a:lumMod val="110000"/>
+                <a:satMod val="105000"/>
+                <a:tint val="67000"/>
+              </a:schemeClr>
+            </a:gs>
+            <a:gs pos="50000">
+              <a:schemeClr val="phClr">
+                <a:lumMod val="105000"/>
+                <a:satMod val="103000"/>
+                <a:tint val="73000"/>
+              </a:schemeClr>
+            </a:gs>
+            <a:gs pos="100000">
+              <a:schemeClr val="phClr">
+                <a:lumMod val="105000"/>
+                <a:satMod val="109000"/>
+                <a:tint val="81000"/>
+              </a:schemeClr>
+            </a:gs>
+          </a:gsLst>
+          <a:lin ang="5400000" scaled="0"/>
+        </a:gradFill>
+        <a:gradFill rotWithShape="1">
+          <a:gsLst>
+            <a:gs pos="0">
+              <a:schemeClr val="phClr">
+                <a:satMod val="103000"/>
+                <a:lumMod val="102000"/>
+                <a:tint val="94000"/>
+              </a:schemeClr>
+            </a:gs>
+            <a:gs pos="50000">
+              <a:schemeClr val="phClr">
+                <a:satMod val="110000"/>
+                <a:lumMod val="100000"/>
+                <a:shade val="100000"/>
+              </a:schemeClr>
+            </a:gs>
+            <a:gs pos="100000">
+              <a:schemeClr val="phClr">
+                <a:lumMod val="99000"/>
+                <a:satMod val="120000"/>
+                <a:shade val="78000"/>
+              </a:schemeClr>
+            </a:gs>
+          </a:gsLst>
+          <a:lin ang="5400000" scaled="0"/>
+        </a:gradFill>
+      </a:fillStyleLst>
+      <a:lnStyleLst>
+        <a:ln w="6350" cap="flat" cmpd="sng" algn="ctr">
+          <a:solidFill>
+            <a:schemeClr val="phClr"/>
+          </a:solidFill>
+          <a:prstDash val="solid"/>
+          <a:miter lim="800000"/>
+        </a:ln>
+        <a:ln w="12700" cap="flat" cmpd="sng" algn="ctr">
+          <a:solidFill>
+            <a:schemeClr val="phClr"/>
+          </a:solidFill>
+          <a:prstDash val="solid"/>
+          <a:miter lim="800000"/>
+        </a:ln>
+        <a:ln w="19050" cap="flat" cmpd="sng" algn="ctr">
+          <a:solidFill>
+            <a:schemeClr val="phClr"/>
+          </a:solidFill>
+          <a:prstDash val="solid"/>
+          <a:miter lim="800000"/>
+        </a:ln>
+      </a:lnStyleLst>
+      <a:effectStyleLst>
+        <a:effectStyle>
+          <a:effectLst/>
+        </a:effectStyle>
+        <a:effectStyle>
+          <a:effectLst/>
+        </a:effectStyle>
+        <a:effectStyle>
+          <a:effectLst>
+            <a:outerShdw blurRad="57150" dist="19050" dir="5400000" algn="ctr" rotWithShape="0">
+              <a:srgbClr val="000000">
+                <a:alpha val="63000"/>
+              </a:srgbClr>
+            </a:outerShdw>
+          </a:effectLst>
+        </a:effectStyle>
+      </a:effectStyleLst>
+      <a:bgFillStyleLst>
+        <a:solidFill>
+          <a:schemeClr val="phClr"/>
+        </a:solidFill>
+        <a:solidFill>
+          <a:schemeClr val="phClr">
+            <a:tint val="95000"/>
+            <a:satMod val="170000"/>
+          </a:schemeClr>
+        </a:solidFill>
+        <a:gradFill rotWithShape="1">
+          <a:gsLst>
+            <a:gs pos="0">
+              <a:schemeClr val="phClr">
+                <a:tint val="93000"/>
+                <a:satMod val="150000"/>
+                <a:shade val="98000"/>
+                <a:lumMod val="102000"/>
+              </a:schemeClr>
+            </a:gs>
+            <a:gs pos="50000">
+              <a:schemeClr val="phClr">
+                <a:tint val="98000"/>
+                <a:satMod val="130000"/>
+                <a:shade val="90000"/>
+                <a:lumMod val="103000"/>
+              </a:schemeClr>
+            </a:gs>
+            <a:gs pos="100000">
+              <a:schemeClr val="phClr">
+                <a:shade val="63000"/>
+                <a:satMod val="120000"/>
+              </a:schemeClr>
+            </a:gs>
+          </a:gsLst>
+          <a:lin ang="5400000" scaled="0"/>
+        </a:gradFill>
+      </a:bgFillStyleLst>
+    </a:fmtScheme>
+  </a:themeElements>
+  <a:extLst>
+    <a:ext uri="{05A4C25C-085E-4340-85A3-A5531E510DB2}">
+      <thm15:themeFamily xmlns:thm15="http://schemas.microsoft.com/office/thememl/2012/main" name="Office Theme" id="{62F939B6-93AF-4DB8-9C6B-D6C7DFDC589F}" vid="{4A3C46E8-61CC-4603-A589-7422A47A8E4A}"/>
+    </a:ext>
+  </a:extLst>
+</a:theme>
 </file>